--- a/presentasi/Paparan_BHP_Medan_RUU_Profesi_Kurator.pptx
+++ b/presentasi/Paparan_BHP_Medan_RUU_Profesi_Kurator.pptx
@@ -5315,7 +5315,7 @@
                 <a:ea typeface="Arial" pitchFamily="34" charset="-122"/>
                 <a:cs typeface="Arial" pitchFamily="34" charset="-120"/>
               </a:rPr>
-              <a:t>Kepala Balai Harta Peninggalan Medan · Medan, 1 Oktober 2026</a:t>
+              <a:t>Kepala Balai Harta Peninggalan Medan · Medan, 2 Oktober 2026</a:t>
             </a:r>
             <a:endParaRPr lang="en-US" sz="2200" dirty="0"/>
           </a:p>

--- a/presentasi/Paparan_BHP_Medan_RUU_Profesi_Kurator.pptx
+++ b/presentasi/Paparan_BHP_Medan_RUU_Profesi_Kurator.pptx
@@ -2485,7 +2485,7 @@
           <a:p>
             <a:r>
               <a:rPr lang="en-US" dirty="0"/>
-              <a:t>Bahan masukan memuat 17 usulan pasal (termasuk Pasal 1 Ketentuan Umum dengan 13 definisi) dan 4 usulan penjelasan. Usulan rumusan pasal untuk setiap masukan dihimpun dalam Lampiran I. Penomoran pasal ditulis "Pasal …" karena bersifat sementara, sedangkan istilah Debitor, Kreditor, Debitor Pailit, Hakim Pengawas, dan Pengadilan mengikuti pengertian dalam UU Kepailitan dan PKPU.</a:t>
+              <a:t>Bahan masukan memuat 17 usulan pasal (termasuk Pasal 1 Ketentuan Umum dengan 13 definisi) dan 4 usulan penjelasan. Setiap masukan disertai usulan rumusan pasal yang dihimpun dalam Lampiran I. Penomoran pasal ditulis "Pasal …" karena bersifat sementara dan akan disesuaikan dengan sistematika RUU.</a:t>
             </a:r>
             <a:endParaRPr lang="en-US" dirty="0"/>
           </a:p>

--- a/presentasi/Paparan_BHP_Medan_RUU_Profesi_Kurator.pptx
+++ b/presentasi/Paparan_BHP_Medan_RUU_Profesi_Kurator.pptx
@@ -549,7 +549,7 @@
           <a:p>
             <a:r>
               <a:rPr lang="en-US" dirty="0"/>
-              <a:t>Pembukaan. Salam hormat kepada Pimpinan dan Anggota Komisi XIII DPR RI.</a:t>
+              <a:t>Pembukaan dan salam hormat.</a:t>
             </a:r>
             <a:endParaRPr lang="en-US" dirty="0"/>
           </a:p>
@@ -32366,45 +32366,6 @@
         </p:nvSpPr>
         <p:spPr>
           <a:xfrm>
-            <a:off x="731520" y="3200400"/>
-            <a:ext cx="10698480" cy="1097280"/>
-          </a:xfrm>
-          <a:prstGeom prst="rect">
-            <a:avLst/>
-          </a:prstGeom>
-          <a:noFill/>
-          <a:ln/>
-        </p:spPr>
-        <p:txBody>
-          <a:bodyPr wrap="square" lIns="0" tIns="0" rIns="0" bIns="0" rtlCol="0" anchor="t"/>
-          <a:lstStyle/>
-          <a:p>
-            <a:pPr indent="0" marL="0">
-              <a:buNone/>
-            </a:pPr>
-            <a:r>
-              <a:rPr lang="en-US" sz="2400" dirty="0">
-                <a:solidFill>
-                  <a:srgbClr val="FFFFFF"/>
-                </a:solidFill>
-                <a:latin typeface="Arial" pitchFamily="34" charset="0"/>
-                <a:ea typeface="Arial" pitchFamily="34" charset="-122"/>
-                <a:cs typeface="Arial" pitchFamily="34" charset="-120"/>
-              </a:rPr>
-              <a:t>Demikian bahan masukan ini disampaikan. Atas perhatian Pimpinan dan Anggota Komisi XIII DPR RI, kami ucapkan terima kasih.</a:t>
-            </a:r>
-            <a:endParaRPr lang="en-US" sz="2400" dirty="0"/>
-          </a:p>
-        </p:txBody>
-      </p:sp>
-      <p:sp>
-        <p:nvSpPr>
-          <p:cNvPr id="5" name="Text 3"/>
-          <p:cNvSpPr txBox="1"/>
-          <p:nvPr/>
-        </p:nvSpPr>
-        <p:spPr>
-          <a:xfrm>
             <a:off x="731520" y="4937760"/>
             <a:ext cx="10698480" cy="822960"/>
           </a:xfrm>

--- a/presentasi/Paparan_BHP_Medan_RUU_Profesi_Kurator.pptx
+++ b/presentasi/Paparan_BHP_Medan_RUU_Profesi_Kurator.pptx
@@ -3039,7 +3039,7 @@
           <a:spcPct val="20000"/>
         </a:spcBef>
         <a:buFont typeface="Arial" pitchFamily="34" charset="0"/>
-        <a:buChar char="–"/>
+        <a:buChar char="•"/>
         <a:defRPr sz="2800" kern="1200">
           <a:solidFill>
             <a:schemeClr val="tx1"/>
@@ -3069,7 +3069,7 @@
           <a:spcPct val="20000"/>
         </a:spcBef>
         <a:buFont typeface="Arial" pitchFamily="34" charset="0"/>
-        <a:buChar char="–"/>
+        <a:buChar char="•"/>
         <a:defRPr sz="2000" kern="1200">
           <a:solidFill>
             <a:schemeClr val="tx1"/>
